--- a/src/main/resources/static/image/default/title.pptx
+++ b/src/main/resources/static/image/default/title.pptx
@@ -104,6 +104,11 @@
       </a:defRPr>
     </a:lvl9pPr>
   </p:defaultTextStyle>
+  <p:extLst>
+    <p:ext uri="{EFAFB233-063F-42B5-8137-9DF3F51BA10A}">
+      <p15:sldGuideLst xmlns:p15="http://schemas.microsoft.com/office/powerpoint/2012/main"/>
+    </p:ext>
+  </p:extLst>
 </p:presentation>
 </file>
 
@@ -149,10 +154,9 @@
           </a:lstStyle>
           <a:p>
             <a:r>
-              <a:rPr kumimoji="1" lang="ja-JP" altLang="en-US" smtClean="0"/>
+              <a:rPr kumimoji="1" lang="ja-JP" altLang="en-US"/>
               <a:t>マスター タイトルの書式設定</a:t>
             </a:r>
-            <a:endParaRPr kumimoji="1" lang="ja-JP" altLang="en-US"/>
           </a:p>
         </p:txBody>
       </p:sp>
@@ -214,10 +218,9 @@
           </a:lstStyle>
           <a:p>
             <a:r>
-              <a:rPr kumimoji="1" lang="ja-JP" altLang="en-US" smtClean="0"/>
+              <a:rPr kumimoji="1" lang="ja-JP" altLang="en-US"/>
               <a:t>マスター サブタイトルの書式設定</a:t>
             </a:r>
-            <a:endParaRPr kumimoji="1" lang="ja-JP" altLang="en-US"/>
           </a:p>
         </p:txBody>
       </p:sp>
@@ -238,7 +241,7 @@
           <a:p>
             <a:fld id="{B8DAB099-5D2C-433C-B6DE-CAADC0029E46}" type="datetimeFigureOut">
               <a:rPr kumimoji="1" lang="ja-JP" altLang="en-US" smtClean="0"/>
-              <a:t>2025/6/2</a:t>
+              <a:t>2026/3/5</a:t>
             </a:fld>
             <a:endParaRPr kumimoji="1" lang="ja-JP" altLang="en-US"/>
           </a:p>
@@ -332,10 +335,9 @@
           <a:lstStyle/>
           <a:p>
             <a:r>
-              <a:rPr kumimoji="1" lang="ja-JP" altLang="en-US" smtClean="0"/>
+              <a:rPr kumimoji="1" lang="ja-JP" altLang="en-US"/>
               <a:t>マスター タイトルの書式設定</a:t>
             </a:r>
-            <a:endParaRPr kumimoji="1" lang="ja-JP" altLang="en-US"/>
           </a:p>
         </p:txBody>
       </p:sp>
@@ -356,70 +358,69 @@
           <a:p>
             <a:pPr lvl="0"/>
             <a:r>
-              <a:rPr kumimoji="1" lang="ja-JP" altLang="en-US" smtClean="0"/>
+              <a:rPr kumimoji="1" lang="ja-JP" altLang="en-US"/>
               <a:t>マスター テキストの書式設定</a:t>
             </a:r>
           </a:p>
           <a:p>
             <a:pPr lvl="1"/>
             <a:r>
-              <a:rPr kumimoji="1" lang="ja-JP" altLang="en-US" smtClean="0"/>
+              <a:rPr kumimoji="1" lang="ja-JP" altLang="en-US"/>
               <a:t>第 </a:t>
             </a:r>
             <a:r>
-              <a:rPr kumimoji="1" lang="en-US" altLang="ja-JP" smtClean="0"/>
+              <a:rPr kumimoji="1" lang="en-US" altLang="ja-JP"/>
               <a:t>2 </a:t>
             </a:r>
             <a:r>
-              <a:rPr kumimoji="1" lang="ja-JP" altLang="en-US" smtClean="0"/>
+              <a:rPr kumimoji="1" lang="ja-JP" altLang="en-US"/>
               <a:t>レベル</a:t>
             </a:r>
           </a:p>
           <a:p>
             <a:pPr lvl="2"/>
             <a:r>
-              <a:rPr kumimoji="1" lang="ja-JP" altLang="en-US" smtClean="0"/>
+              <a:rPr kumimoji="1" lang="ja-JP" altLang="en-US"/>
               <a:t>第 </a:t>
             </a:r>
             <a:r>
-              <a:rPr kumimoji="1" lang="en-US" altLang="ja-JP" smtClean="0"/>
+              <a:rPr kumimoji="1" lang="en-US" altLang="ja-JP"/>
               <a:t>3 </a:t>
             </a:r>
             <a:r>
-              <a:rPr kumimoji="1" lang="ja-JP" altLang="en-US" smtClean="0"/>
+              <a:rPr kumimoji="1" lang="ja-JP" altLang="en-US"/>
               <a:t>レベル</a:t>
             </a:r>
           </a:p>
           <a:p>
             <a:pPr lvl="3"/>
             <a:r>
-              <a:rPr kumimoji="1" lang="ja-JP" altLang="en-US" smtClean="0"/>
+              <a:rPr kumimoji="1" lang="ja-JP" altLang="en-US"/>
               <a:t>第 </a:t>
             </a:r>
             <a:r>
-              <a:rPr kumimoji="1" lang="en-US" altLang="ja-JP" smtClean="0"/>
+              <a:rPr kumimoji="1" lang="en-US" altLang="ja-JP"/>
               <a:t>4 </a:t>
             </a:r>
             <a:r>
-              <a:rPr kumimoji="1" lang="ja-JP" altLang="en-US" smtClean="0"/>
+              <a:rPr kumimoji="1" lang="ja-JP" altLang="en-US"/>
               <a:t>レベル</a:t>
             </a:r>
           </a:p>
           <a:p>
             <a:pPr lvl="4"/>
             <a:r>
-              <a:rPr kumimoji="1" lang="ja-JP" altLang="en-US" smtClean="0"/>
+              <a:rPr kumimoji="1" lang="ja-JP" altLang="en-US"/>
               <a:t>第 </a:t>
             </a:r>
             <a:r>
-              <a:rPr kumimoji="1" lang="en-US" altLang="ja-JP" smtClean="0"/>
+              <a:rPr kumimoji="1" lang="en-US" altLang="ja-JP"/>
               <a:t>5 </a:t>
             </a:r>
             <a:r>
-              <a:rPr kumimoji="1" lang="ja-JP" altLang="en-US" smtClean="0"/>
+              <a:rPr kumimoji="1" lang="ja-JP" altLang="en-US"/>
               <a:t>レベル</a:t>
             </a:r>
-            <a:endParaRPr kumimoji="1" lang="ja-JP" altLang="en-US"/>
           </a:p>
         </p:txBody>
       </p:sp>
@@ -440,7 +441,7 @@
           <a:p>
             <a:fld id="{B8DAB099-5D2C-433C-B6DE-CAADC0029E46}" type="datetimeFigureOut">
               <a:rPr kumimoji="1" lang="ja-JP" altLang="en-US" smtClean="0"/>
-              <a:t>2025/6/2</a:t>
+              <a:t>2026/3/5</a:t>
             </a:fld>
             <a:endParaRPr kumimoji="1" lang="ja-JP" altLang="en-US"/>
           </a:p>
@@ -539,10 +540,9 @@
           <a:lstStyle/>
           <a:p>
             <a:r>
-              <a:rPr kumimoji="1" lang="ja-JP" altLang="en-US" smtClean="0"/>
+              <a:rPr kumimoji="1" lang="ja-JP" altLang="en-US"/>
               <a:t>マスター タイトルの書式設定</a:t>
             </a:r>
-            <a:endParaRPr kumimoji="1" lang="ja-JP" altLang="en-US"/>
           </a:p>
         </p:txBody>
       </p:sp>
@@ -568,70 +568,69 @@
           <a:p>
             <a:pPr lvl="0"/>
             <a:r>
-              <a:rPr kumimoji="1" lang="ja-JP" altLang="en-US" smtClean="0"/>
+              <a:rPr kumimoji="1" lang="ja-JP" altLang="en-US"/>
               <a:t>マスター テキストの書式設定</a:t>
             </a:r>
           </a:p>
           <a:p>
             <a:pPr lvl="1"/>
             <a:r>
-              <a:rPr kumimoji="1" lang="ja-JP" altLang="en-US" smtClean="0"/>
+              <a:rPr kumimoji="1" lang="ja-JP" altLang="en-US"/>
               <a:t>第 </a:t>
             </a:r>
             <a:r>
-              <a:rPr kumimoji="1" lang="en-US" altLang="ja-JP" smtClean="0"/>
+              <a:rPr kumimoji="1" lang="en-US" altLang="ja-JP"/>
               <a:t>2 </a:t>
             </a:r>
             <a:r>
-              <a:rPr kumimoji="1" lang="ja-JP" altLang="en-US" smtClean="0"/>
+              <a:rPr kumimoji="1" lang="ja-JP" altLang="en-US"/>
               <a:t>レベル</a:t>
             </a:r>
           </a:p>
           <a:p>
             <a:pPr lvl="2"/>
             <a:r>
-              <a:rPr kumimoji="1" lang="ja-JP" altLang="en-US" smtClean="0"/>
+              <a:rPr kumimoji="1" lang="ja-JP" altLang="en-US"/>
               <a:t>第 </a:t>
             </a:r>
             <a:r>
-              <a:rPr kumimoji="1" lang="en-US" altLang="ja-JP" smtClean="0"/>
+              <a:rPr kumimoji="1" lang="en-US" altLang="ja-JP"/>
               <a:t>3 </a:t>
             </a:r>
             <a:r>
-              <a:rPr kumimoji="1" lang="ja-JP" altLang="en-US" smtClean="0"/>
+              <a:rPr kumimoji="1" lang="ja-JP" altLang="en-US"/>
               <a:t>レベル</a:t>
             </a:r>
           </a:p>
           <a:p>
             <a:pPr lvl="3"/>
             <a:r>
-              <a:rPr kumimoji="1" lang="ja-JP" altLang="en-US" smtClean="0"/>
+              <a:rPr kumimoji="1" lang="ja-JP" altLang="en-US"/>
               <a:t>第 </a:t>
             </a:r>
             <a:r>
-              <a:rPr kumimoji="1" lang="en-US" altLang="ja-JP" smtClean="0"/>
+              <a:rPr kumimoji="1" lang="en-US" altLang="ja-JP"/>
               <a:t>4 </a:t>
             </a:r>
             <a:r>
-              <a:rPr kumimoji="1" lang="ja-JP" altLang="en-US" smtClean="0"/>
+              <a:rPr kumimoji="1" lang="ja-JP" altLang="en-US"/>
               <a:t>レベル</a:t>
             </a:r>
           </a:p>
           <a:p>
             <a:pPr lvl="4"/>
             <a:r>
-              <a:rPr kumimoji="1" lang="ja-JP" altLang="en-US" smtClean="0"/>
+              <a:rPr kumimoji="1" lang="ja-JP" altLang="en-US"/>
               <a:t>第 </a:t>
             </a:r>
             <a:r>
-              <a:rPr kumimoji="1" lang="en-US" altLang="ja-JP" smtClean="0"/>
+              <a:rPr kumimoji="1" lang="en-US" altLang="ja-JP"/>
               <a:t>5 </a:t>
             </a:r>
             <a:r>
-              <a:rPr kumimoji="1" lang="ja-JP" altLang="en-US" smtClean="0"/>
+              <a:rPr kumimoji="1" lang="ja-JP" altLang="en-US"/>
               <a:t>レベル</a:t>
             </a:r>
-            <a:endParaRPr kumimoji="1" lang="ja-JP" altLang="en-US"/>
           </a:p>
         </p:txBody>
       </p:sp>
@@ -652,7 +651,7 @@
           <a:p>
             <a:fld id="{B8DAB099-5D2C-433C-B6DE-CAADC0029E46}" type="datetimeFigureOut">
               <a:rPr kumimoji="1" lang="ja-JP" altLang="en-US" smtClean="0"/>
-              <a:t>2025/6/2</a:t>
+              <a:t>2026/3/5</a:t>
             </a:fld>
             <a:endParaRPr kumimoji="1" lang="ja-JP" altLang="en-US"/>
           </a:p>
@@ -746,10 +745,9 @@
           <a:lstStyle/>
           <a:p>
             <a:r>
-              <a:rPr kumimoji="1" lang="ja-JP" altLang="en-US" smtClean="0"/>
+              <a:rPr kumimoji="1" lang="ja-JP" altLang="en-US"/>
               <a:t>マスター タイトルの書式設定</a:t>
             </a:r>
-            <a:endParaRPr kumimoji="1" lang="ja-JP" altLang="en-US"/>
           </a:p>
         </p:txBody>
       </p:sp>
@@ -770,70 +768,69 @@
           <a:p>
             <a:pPr lvl="0"/>
             <a:r>
-              <a:rPr kumimoji="1" lang="ja-JP" altLang="en-US" smtClean="0"/>
+              <a:rPr kumimoji="1" lang="ja-JP" altLang="en-US"/>
               <a:t>マスター テキストの書式設定</a:t>
             </a:r>
           </a:p>
           <a:p>
             <a:pPr lvl="1"/>
             <a:r>
-              <a:rPr kumimoji="1" lang="ja-JP" altLang="en-US" smtClean="0"/>
+              <a:rPr kumimoji="1" lang="ja-JP" altLang="en-US"/>
               <a:t>第 </a:t>
             </a:r>
             <a:r>
-              <a:rPr kumimoji="1" lang="en-US" altLang="ja-JP" smtClean="0"/>
+              <a:rPr kumimoji="1" lang="en-US" altLang="ja-JP"/>
               <a:t>2 </a:t>
             </a:r>
             <a:r>
-              <a:rPr kumimoji="1" lang="ja-JP" altLang="en-US" smtClean="0"/>
+              <a:rPr kumimoji="1" lang="ja-JP" altLang="en-US"/>
               <a:t>レベル</a:t>
             </a:r>
           </a:p>
           <a:p>
             <a:pPr lvl="2"/>
             <a:r>
-              <a:rPr kumimoji="1" lang="ja-JP" altLang="en-US" smtClean="0"/>
+              <a:rPr kumimoji="1" lang="ja-JP" altLang="en-US"/>
               <a:t>第 </a:t>
             </a:r>
             <a:r>
-              <a:rPr kumimoji="1" lang="en-US" altLang="ja-JP" smtClean="0"/>
+              <a:rPr kumimoji="1" lang="en-US" altLang="ja-JP"/>
               <a:t>3 </a:t>
             </a:r>
             <a:r>
-              <a:rPr kumimoji="1" lang="ja-JP" altLang="en-US" smtClean="0"/>
+              <a:rPr kumimoji="1" lang="ja-JP" altLang="en-US"/>
               <a:t>レベル</a:t>
             </a:r>
           </a:p>
           <a:p>
             <a:pPr lvl="3"/>
             <a:r>
-              <a:rPr kumimoji="1" lang="ja-JP" altLang="en-US" smtClean="0"/>
+              <a:rPr kumimoji="1" lang="ja-JP" altLang="en-US"/>
               <a:t>第 </a:t>
             </a:r>
             <a:r>
-              <a:rPr kumimoji="1" lang="en-US" altLang="ja-JP" smtClean="0"/>
+              <a:rPr kumimoji="1" lang="en-US" altLang="ja-JP"/>
               <a:t>4 </a:t>
             </a:r>
             <a:r>
-              <a:rPr kumimoji="1" lang="ja-JP" altLang="en-US" smtClean="0"/>
+              <a:rPr kumimoji="1" lang="ja-JP" altLang="en-US"/>
               <a:t>レベル</a:t>
             </a:r>
           </a:p>
           <a:p>
             <a:pPr lvl="4"/>
             <a:r>
-              <a:rPr kumimoji="1" lang="ja-JP" altLang="en-US" smtClean="0"/>
+              <a:rPr kumimoji="1" lang="ja-JP" altLang="en-US"/>
               <a:t>第 </a:t>
             </a:r>
             <a:r>
-              <a:rPr kumimoji="1" lang="en-US" altLang="ja-JP" smtClean="0"/>
+              <a:rPr kumimoji="1" lang="en-US" altLang="ja-JP"/>
               <a:t>5 </a:t>
             </a:r>
             <a:r>
-              <a:rPr kumimoji="1" lang="ja-JP" altLang="en-US" smtClean="0"/>
+              <a:rPr kumimoji="1" lang="ja-JP" altLang="en-US"/>
               <a:t>レベル</a:t>
             </a:r>
-            <a:endParaRPr kumimoji="1" lang="ja-JP" altLang="en-US"/>
           </a:p>
         </p:txBody>
       </p:sp>
@@ -854,7 +851,7 @@
           <a:p>
             <a:fld id="{B8DAB099-5D2C-433C-B6DE-CAADC0029E46}" type="datetimeFigureOut">
               <a:rPr kumimoji="1" lang="ja-JP" altLang="en-US" smtClean="0"/>
-              <a:t>2025/6/2</a:t>
+              <a:t>2026/3/5</a:t>
             </a:fld>
             <a:endParaRPr kumimoji="1" lang="ja-JP" altLang="en-US"/>
           </a:p>
@@ -957,10 +954,9 @@
           </a:lstStyle>
           <a:p>
             <a:r>
-              <a:rPr kumimoji="1" lang="ja-JP" altLang="en-US" smtClean="0"/>
+              <a:rPr kumimoji="1" lang="ja-JP" altLang="en-US"/>
               <a:t>マスター タイトルの書式設定</a:t>
             </a:r>
-            <a:endParaRPr kumimoji="1" lang="ja-JP" altLang="en-US"/>
           </a:p>
         </p:txBody>
       </p:sp>
@@ -1077,7 +1073,7 @@
           <a:p>
             <a:pPr lvl="0"/>
             <a:r>
-              <a:rPr kumimoji="1" lang="ja-JP" altLang="en-US" smtClean="0"/>
+              <a:rPr kumimoji="1" lang="ja-JP" altLang="en-US"/>
               <a:t>マスター テキストの書式設定</a:t>
             </a:r>
           </a:p>
@@ -1100,7 +1096,7 @@
           <a:p>
             <a:fld id="{B8DAB099-5D2C-433C-B6DE-CAADC0029E46}" type="datetimeFigureOut">
               <a:rPr kumimoji="1" lang="ja-JP" altLang="en-US" smtClean="0"/>
-              <a:t>2025/6/2</a:t>
+              <a:t>2026/3/5</a:t>
             </a:fld>
             <a:endParaRPr kumimoji="1" lang="ja-JP" altLang="en-US"/>
           </a:p>
@@ -1194,10 +1190,9 @@
           <a:lstStyle/>
           <a:p>
             <a:r>
-              <a:rPr kumimoji="1" lang="ja-JP" altLang="en-US" smtClean="0"/>
+              <a:rPr kumimoji="1" lang="ja-JP" altLang="en-US"/>
               <a:t>マスター タイトルの書式設定</a:t>
             </a:r>
-            <a:endParaRPr kumimoji="1" lang="ja-JP" altLang="en-US"/>
           </a:p>
         </p:txBody>
       </p:sp>
@@ -1223,70 +1218,69 @@
           <a:p>
             <a:pPr lvl="0"/>
             <a:r>
-              <a:rPr kumimoji="1" lang="ja-JP" altLang="en-US" smtClean="0"/>
+              <a:rPr kumimoji="1" lang="ja-JP" altLang="en-US"/>
               <a:t>マスター テキストの書式設定</a:t>
             </a:r>
           </a:p>
           <a:p>
             <a:pPr lvl="1"/>
             <a:r>
-              <a:rPr kumimoji="1" lang="ja-JP" altLang="en-US" smtClean="0"/>
+              <a:rPr kumimoji="1" lang="ja-JP" altLang="en-US"/>
               <a:t>第 </a:t>
             </a:r>
             <a:r>
-              <a:rPr kumimoji="1" lang="en-US" altLang="ja-JP" smtClean="0"/>
+              <a:rPr kumimoji="1" lang="en-US" altLang="ja-JP"/>
               <a:t>2 </a:t>
             </a:r>
             <a:r>
-              <a:rPr kumimoji="1" lang="ja-JP" altLang="en-US" smtClean="0"/>
+              <a:rPr kumimoji="1" lang="ja-JP" altLang="en-US"/>
               <a:t>レベル</a:t>
             </a:r>
           </a:p>
           <a:p>
             <a:pPr lvl="2"/>
             <a:r>
-              <a:rPr kumimoji="1" lang="ja-JP" altLang="en-US" smtClean="0"/>
+              <a:rPr kumimoji="1" lang="ja-JP" altLang="en-US"/>
               <a:t>第 </a:t>
             </a:r>
             <a:r>
-              <a:rPr kumimoji="1" lang="en-US" altLang="ja-JP" smtClean="0"/>
+              <a:rPr kumimoji="1" lang="en-US" altLang="ja-JP"/>
               <a:t>3 </a:t>
             </a:r>
             <a:r>
-              <a:rPr kumimoji="1" lang="ja-JP" altLang="en-US" smtClean="0"/>
+              <a:rPr kumimoji="1" lang="ja-JP" altLang="en-US"/>
               <a:t>レベル</a:t>
             </a:r>
           </a:p>
           <a:p>
             <a:pPr lvl="3"/>
             <a:r>
-              <a:rPr kumimoji="1" lang="ja-JP" altLang="en-US" smtClean="0"/>
+              <a:rPr kumimoji="1" lang="ja-JP" altLang="en-US"/>
               <a:t>第 </a:t>
             </a:r>
             <a:r>
-              <a:rPr kumimoji="1" lang="en-US" altLang="ja-JP" smtClean="0"/>
+              <a:rPr kumimoji="1" lang="en-US" altLang="ja-JP"/>
               <a:t>4 </a:t>
             </a:r>
             <a:r>
-              <a:rPr kumimoji="1" lang="ja-JP" altLang="en-US" smtClean="0"/>
+              <a:rPr kumimoji="1" lang="ja-JP" altLang="en-US"/>
               <a:t>レベル</a:t>
             </a:r>
           </a:p>
           <a:p>
             <a:pPr lvl="4"/>
             <a:r>
-              <a:rPr kumimoji="1" lang="ja-JP" altLang="en-US" smtClean="0"/>
+              <a:rPr kumimoji="1" lang="ja-JP" altLang="en-US"/>
               <a:t>第 </a:t>
             </a:r>
             <a:r>
-              <a:rPr kumimoji="1" lang="en-US" altLang="ja-JP" smtClean="0"/>
+              <a:rPr kumimoji="1" lang="en-US" altLang="ja-JP"/>
               <a:t>5 </a:t>
             </a:r>
             <a:r>
-              <a:rPr kumimoji="1" lang="ja-JP" altLang="en-US" smtClean="0"/>
+              <a:rPr kumimoji="1" lang="ja-JP" altLang="en-US"/>
               <a:t>レベル</a:t>
             </a:r>
-            <a:endParaRPr kumimoji="1" lang="ja-JP" altLang="en-US"/>
           </a:p>
         </p:txBody>
       </p:sp>
@@ -1312,70 +1306,69 @@
           <a:p>
             <a:pPr lvl="0"/>
             <a:r>
-              <a:rPr kumimoji="1" lang="ja-JP" altLang="en-US" smtClean="0"/>
+              <a:rPr kumimoji="1" lang="ja-JP" altLang="en-US"/>
               <a:t>マスター テキストの書式設定</a:t>
             </a:r>
           </a:p>
           <a:p>
             <a:pPr lvl="1"/>
             <a:r>
-              <a:rPr kumimoji="1" lang="ja-JP" altLang="en-US" smtClean="0"/>
+              <a:rPr kumimoji="1" lang="ja-JP" altLang="en-US"/>
               <a:t>第 </a:t>
             </a:r>
             <a:r>
-              <a:rPr kumimoji="1" lang="en-US" altLang="ja-JP" smtClean="0"/>
+              <a:rPr kumimoji="1" lang="en-US" altLang="ja-JP"/>
               <a:t>2 </a:t>
             </a:r>
             <a:r>
-              <a:rPr kumimoji="1" lang="ja-JP" altLang="en-US" smtClean="0"/>
+              <a:rPr kumimoji="1" lang="ja-JP" altLang="en-US"/>
               <a:t>レベル</a:t>
             </a:r>
           </a:p>
           <a:p>
             <a:pPr lvl="2"/>
             <a:r>
-              <a:rPr kumimoji="1" lang="ja-JP" altLang="en-US" smtClean="0"/>
+              <a:rPr kumimoji="1" lang="ja-JP" altLang="en-US"/>
               <a:t>第 </a:t>
             </a:r>
             <a:r>
-              <a:rPr kumimoji="1" lang="en-US" altLang="ja-JP" smtClean="0"/>
+              <a:rPr kumimoji="1" lang="en-US" altLang="ja-JP"/>
               <a:t>3 </a:t>
             </a:r>
             <a:r>
-              <a:rPr kumimoji="1" lang="ja-JP" altLang="en-US" smtClean="0"/>
+              <a:rPr kumimoji="1" lang="ja-JP" altLang="en-US"/>
               <a:t>レベル</a:t>
             </a:r>
           </a:p>
           <a:p>
             <a:pPr lvl="3"/>
             <a:r>
-              <a:rPr kumimoji="1" lang="ja-JP" altLang="en-US" smtClean="0"/>
+              <a:rPr kumimoji="1" lang="ja-JP" altLang="en-US"/>
               <a:t>第 </a:t>
             </a:r>
             <a:r>
-              <a:rPr kumimoji="1" lang="en-US" altLang="ja-JP" smtClean="0"/>
+              <a:rPr kumimoji="1" lang="en-US" altLang="ja-JP"/>
               <a:t>4 </a:t>
             </a:r>
             <a:r>
-              <a:rPr kumimoji="1" lang="ja-JP" altLang="en-US" smtClean="0"/>
+              <a:rPr kumimoji="1" lang="ja-JP" altLang="en-US"/>
               <a:t>レベル</a:t>
             </a:r>
           </a:p>
           <a:p>
             <a:pPr lvl="4"/>
             <a:r>
-              <a:rPr kumimoji="1" lang="ja-JP" altLang="en-US" smtClean="0"/>
+              <a:rPr kumimoji="1" lang="ja-JP" altLang="en-US"/>
               <a:t>第 </a:t>
             </a:r>
             <a:r>
-              <a:rPr kumimoji="1" lang="en-US" altLang="ja-JP" smtClean="0"/>
+              <a:rPr kumimoji="1" lang="en-US" altLang="ja-JP"/>
               <a:t>5 </a:t>
             </a:r>
             <a:r>
-              <a:rPr kumimoji="1" lang="ja-JP" altLang="en-US" smtClean="0"/>
+              <a:rPr kumimoji="1" lang="ja-JP" altLang="en-US"/>
               <a:t>レベル</a:t>
             </a:r>
-            <a:endParaRPr kumimoji="1" lang="ja-JP" altLang="en-US"/>
           </a:p>
         </p:txBody>
       </p:sp>
@@ -1396,7 +1389,7 @@
           <a:p>
             <a:fld id="{B8DAB099-5D2C-433C-B6DE-CAADC0029E46}" type="datetimeFigureOut">
               <a:rPr kumimoji="1" lang="ja-JP" altLang="en-US" smtClean="0"/>
-              <a:t>2025/6/2</a:t>
+              <a:t>2026/3/5</a:t>
             </a:fld>
             <a:endParaRPr kumimoji="1" lang="ja-JP" altLang="en-US"/>
           </a:p>
@@ -1495,10 +1488,9 @@
           <a:lstStyle/>
           <a:p>
             <a:r>
-              <a:rPr kumimoji="1" lang="ja-JP" altLang="en-US" smtClean="0"/>
+              <a:rPr kumimoji="1" lang="ja-JP" altLang="en-US"/>
               <a:t>マスター タイトルの書式設定</a:t>
             </a:r>
-            <a:endParaRPr kumimoji="1" lang="ja-JP" altLang="en-US"/>
           </a:p>
         </p:txBody>
       </p:sp>
@@ -1561,7 +1553,7 @@
           <a:p>
             <a:pPr lvl="0"/>
             <a:r>
-              <a:rPr kumimoji="1" lang="ja-JP" altLang="en-US" smtClean="0"/>
+              <a:rPr kumimoji="1" lang="ja-JP" altLang="en-US"/>
               <a:t>マスター テキストの書式設定</a:t>
             </a:r>
           </a:p>
@@ -1589,70 +1581,69 @@
           <a:p>
             <a:pPr lvl="0"/>
             <a:r>
-              <a:rPr kumimoji="1" lang="ja-JP" altLang="en-US" smtClean="0"/>
+              <a:rPr kumimoji="1" lang="ja-JP" altLang="en-US"/>
               <a:t>マスター テキストの書式設定</a:t>
             </a:r>
           </a:p>
           <a:p>
             <a:pPr lvl="1"/>
             <a:r>
-              <a:rPr kumimoji="1" lang="ja-JP" altLang="en-US" smtClean="0"/>
+              <a:rPr kumimoji="1" lang="ja-JP" altLang="en-US"/>
               <a:t>第 </a:t>
             </a:r>
             <a:r>
-              <a:rPr kumimoji="1" lang="en-US" altLang="ja-JP" smtClean="0"/>
+              <a:rPr kumimoji="1" lang="en-US" altLang="ja-JP"/>
               <a:t>2 </a:t>
             </a:r>
             <a:r>
-              <a:rPr kumimoji="1" lang="ja-JP" altLang="en-US" smtClean="0"/>
+              <a:rPr kumimoji="1" lang="ja-JP" altLang="en-US"/>
               <a:t>レベル</a:t>
             </a:r>
           </a:p>
           <a:p>
             <a:pPr lvl="2"/>
             <a:r>
-              <a:rPr kumimoji="1" lang="ja-JP" altLang="en-US" smtClean="0"/>
+              <a:rPr kumimoji="1" lang="ja-JP" altLang="en-US"/>
               <a:t>第 </a:t>
             </a:r>
             <a:r>
-              <a:rPr kumimoji="1" lang="en-US" altLang="ja-JP" smtClean="0"/>
+              <a:rPr kumimoji="1" lang="en-US" altLang="ja-JP"/>
               <a:t>3 </a:t>
             </a:r>
             <a:r>
-              <a:rPr kumimoji="1" lang="ja-JP" altLang="en-US" smtClean="0"/>
+              <a:rPr kumimoji="1" lang="ja-JP" altLang="en-US"/>
               <a:t>レベル</a:t>
             </a:r>
           </a:p>
           <a:p>
             <a:pPr lvl="3"/>
             <a:r>
-              <a:rPr kumimoji="1" lang="ja-JP" altLang="en-US" smtClean="0"/>
+              <a:rPr kumimoji="1" lang="ja-JP" altLang="en-US"/>
               <a:t>第 </a:t>
             </a:r>
             <a:r>
-              <a:rPr kumimoji="1" lang="en-US" altLang="ja-JP" smtClean="0"/>
+              <a:rPr kumimoji="1" lang="en-US" altLang="ja-JP"/>
               <a:t>4 </a:t>
             </a:r>
             <a:r>
-              <a:rPr kumimoji="1" lang="ja-JP" altLang="en-US" smtClean="0"/>
+              <a:rPr kumimoji="1" lang="ja-JP" altLang="en-US"/>
               <a:t>レベル</a:t>
             </a:r>
           </a:p>
           <a:p>
             <a:pPr lvl="4"/>
             <a:r>
-              <a:rPr kumimoji="1" lang="ja-JP" altLang="en-US" smtClean="0"/>
+              <a:rPr kumimoji="1" lang="ja-JP" altLang="en-US"/>
               <a:t>第 </a:t>
             </a:r>
             <a:r>
-              <a:rPr kumimoji="1" lang="en-US" altLang="ja-JP" smtClean="0"/>
+              <a:rPr kumimoji="1" lang="en-US" altLang="ja-JP"/>
               <a:t>5 </a:t>
             </a:r>
             <a:r>
-              <a:rPr kumimoji="1" lang="ja-JP" altLang="en-US" smtClean="0"/>
+              <a:rPr kumimoji="1" lang="ja-JP" altLang="en-US"/>
               <a:t>レベル</a:t>
             </a:r>
-            <a:endParaRPr kumimoji="1" lang="ja-JP" altLang="en-US"/>
           </a:p>
         </p:txBody>
       </p:sp>
@@ -1715,7 +1706,7 @@
           <a:p>
             <a:pPr lvl="0"/>
             <a:r>
-              <a:rPr kumimoji="1" lang="ja-JP" altLang="en-US" smtClean="0"/>
+              <a:rPr kumimoji="1" lang="ja-JP" altLang="en-US"/>
               <a:t>マスター テキストの書式設定</a:t>
             </a:r>
           </a:p>
@@ -1743,70 +1734,69 @@
           <a:p>
             <a:pPr lvl="0"/>
             <a:r>
-              <a:rPr kumimoji="1" lang="ja-JP" altLang="en-US" smtClean="0"/>
+              <a:rPr kumimoji="1" lang="ja-JP" altLang="en-US"/>
               <a:t>マスター テキストの書式設定</a:t>
             </a:r>
           </a:p>
           <a:p>
             <a:pPr lvl="1"/>
             <a:r>
-              <a:rPr kumimoji="1" lang="ja-JP" altLang="en-US" smtClean="0"/>
+              <a:rPr kumimoji="1" lang="ja-JP" altLang="en-US"/>
               <a:t>第 </a:t>
             </a:r>
             <a:r>
-              <a:rPr kumimoji="1" lang="en-US" altLang="ja-JP" smtClean="0"/>
+              <a:rPr kumimoji="1" lang="en-US" altLang="ja-JP"/>
               <a:t>2 </a:t>
             </a:r>
             <a:r>
-              <a:rPr kumimoji="1" lang="ja-JP" altLang="en-US" smtClean="0"/>
+              <a:rPr kumimoji="1" lang="ja-JP" altLang="en-US"/>
               <a:t>レベル</a:t>
             </a:r>
           </a:p>
           <a:p>
             <a:pPr lvl="2"/>
             <a:r>
-              <a:rPr kumimoji="1" lang="ja-JP" altLang="en-US" smtClean="0"/>
+              <a:rPr kumimoji="1" lang="ja-JP" altLang="en-US"/>
               <a:t>第 </a:t>
             </a:r>
             <a:r>
-              <a:rPr kumimoji="1" lang="en-US" altLang="ja-JP" smtClean="0"/>
+              <a:rPr kumimoji="1" lang="en-US" altLang="ja-JP"/>
               <a:t>3 </a:t>
             </a:r>
             <a:r>
-              <a:rPr kumimoji="1" lang="ja-JP" altLang="en-US" smtClean="0"/>
+              <a:rPr kumimoji="1" lang="ja-JP" altLang="en-US"/>
               <a:t>レベル</a:t>
             </a:r>
           </a:p>
           <a:p>
             <a:pPr lvl="3"/>
             <a:r>
-              <a:rPr kumimoji="1" lang="ja-JP" altLang="en-US" smtClean="0"/>
+              <a:rPr kumimoji="1" lang="ja-JP" altLang="en-US"/>
               <a:t>第 </a:t>
             </a:r>
             <a:r>
-              <a:rPr kumimoji="1" lang="en-US" altLang="ja-JP" smtClean="0"/>
+              <a:rPr kumimoji="1" lang="en-US" altLang="ja-JP"/>
               <a:t>4 </a:t>
             </a:r>
             <a:r>
-              <a:rPr kumimoji="1" lang="ja-JP" altLang="en-US" smtClean="0"/>
+              <a:rPr kumimoji="1" lang="ja-JP" altLang="en-US"/>
               <a:t>レベル</a:t>
             </a:r>
           </a:p>
           <a:p>
             <a:pPr lvl="4"/>
             <a:r>
-              <a:rPr kumimoji="1" lang="ja-JP" altLang="en-US" smtClean="0"/>
+              <a:rPr kumimoji="1" lang="ja-JP" altLang="en-US"/>
               <a:t>第 </a:t>
             </a:r>
             <a:r>
-              <a:rPr kumimoji="1" lang="en-US" altLang="ja-JP" smtClean="0"/>
+              <a:rPr kumimoji="1" lang="en-US" altLang="ja-JP"/>
               <a:t>5 </a:t>
             </a:r>
             <a:r>
-              <a:rPr kumimoji="1" lang="ja-JP" altLang="en-US" smtClean="0"/>
+              <a:rPr kumimoji="1" lang="ja-JP" altLang="en-US"/>
               <a:t>レベル</a:t>
             </a:r>
-            <a:endParaRPr kumimoji="1" lang="ja-JP" altLang="en-US"/>
           </a:p>
         </p:txBody>
       </p:sp>
@@ -1827,7 +1817,7 @@
           <a:p>
             <a:fld id="{B8DAB099-5D2C-433C-B6DE-CAADC0029E46}" type="datetimeFigureOut">
               <a:rPr kumimoji="1" lang="ja-JP" altLang="en-US" smtClean="0"/>
-              <a:t>2025/6/2</a:t>
+              <a:t>2026/3/5</a:t>
             </a:fld>
             <a:endParaRPr kumimoji="1" lang="ja-JP" altLang="en-US"/>
           </a:p>
@@ -1921,10 +1911,9 @@
           <a:lstStyle/>
           <a:p>
             <a:r>
-              <a:rPr kumimoji="1" lang="ja-JP" altLang="en-US" smtClean="0"/>
+              <a:rPr kumimoji="1" lang="ja-JP" altLang="en-US"/>
               <a:t>マスター タイトルの書式設定</a:t>
             </a:r>
-            <a:endParaRPr kumimoji="1" lang="ja-JP" altLang="en-US"/>
           </a:p>
         </p:txBody>
       </p:sp>
@@ -1945,7 +1934,7 @@
           <a:p>
             <a:fld id="{B8DAB099-5D2C-433C-B6DE-CAADC0029E46}" type="datetimeFigureOut">
               <a:rPr kumimoji="1" lang="ja-JP" altLang="en-US" smtClean="0"/>
-              <a:t>2025/6/2</a:t>
+              <a:t>2026/3/5</a:t>
             </a:fld>
             <a:endParaRPr kumimoji="1" lang="ja-JP" altLang="en-US"/>
           </a:p>
@@ -2040,7 +2029,7 @@
           <a:p>
             <a:fld id="{B8DAB099-5D2C-433C-B6DE-CAADC0029E46}" type="datetimeFigureOut">
               <a:rPr kumimoji="1" lang="ja-JP" altLang="en-US" smtClean="0"/>
-              <a:t>2025/6/2</a:t>
+              <a:t>2026/3/5</a:t>
             </a:fld>
             <a:endParaRPr kumimoji="1" lang="ja-JP" altLang="en-US"/>
           </a:p>
@@ -2143,10 +2132,9 @@
           </a:lstStyle>
           <a:p>
             <a:r>
-              <a:rPr kumimoji="1" lang="ja-JP" altLang="en-US" smtClean="0"/>
+              <a:rPr kumimoji="1" lang="ja-JP" altLang="en-US"/>
               <a:t>マスター タイトルの書式設定</a:t>
             </a:r>
-            <a:endParaRPr kumimoji="1" lang="ja-JP" altLang="en-US"/>
           </a:p>
         </p:txBody>
       </p:sp>
@@ -2200,70 +2188,69 @@
           <a:p>
             <a:pPr lvl="0"/>
             <a:r>
-              <a:rPr kumimoji="1" lang="ja-JP" altLang="en-US" smtClean="0"/>
+              <a:rPr kumimoji="1" lang="ja-JP" altLang="en-US"/>
               <a:t>マスター テキストの書式設定</a:t>
             </a:r>
           </a:p>
           <a:p>
             <a:pPr lvl="1"/>
             <a:r>
-              <a:rPr kumimoji="1" lang="ja-JP" altLang="en-US" smtClean="0"/>
+              <a:rPr kumimoji="1" lang="ja-JP" altLang="en-US"/>
               <a:t>第 </a:t>
             </a:r>
             <a:r>
-              <a:rPr kumimoji="1" lang="en-US" altLang="ja-JP" smtClean="0"/>
+              <a:rPr kumimoji="1" lang="en-US" altLang="ja-JP"/>
               <a:t>2 </a:t>
             </a:r>
             <a:r>
-              <a:rPr kumimoji="1" lang="ja-JP" altLang="en-US" smtClean="0"/>
+              <a:rPr kumimoji="1" lang="ja-JP" altLang="en-US"/>
               <a:t>レベル</a:t>
             </a:r>
           </a:p>
           <a:p>
             <a:pPr lvl="2"/>
             <a:r>
-              <a:rPr kumimoji="1" lang="ja-JP" altLang="en-US" smtClean="0"/>
+              <a:rPr kumimoji="1" lang="ja-JP" altLang="en-US"/>
               <a:t>第 </a:t>
             </a:r>
             <a:r>
-              <a:rPr kumimoji="1" lang="en-US" altLang="ja-JP" smtClean="0"/>
+              <a:rPr kumimoji="1" lang="en-US" altLang="ja-JP"/>
               <a:t>3 </a:t>
             </a:r>
             <a:r>
-              <a:rPr kumimoji="1" lang="ja-JP" altLang="en-US" smtClean="0"/>
+              <a:rPr kumimoji="1" lang="ja-JP" altLang="en-US"/>
               <a:t>レベル</a:t>
             </a:r>
           </a:p>
           <a:p>
             <a:pPr lvl="3"/>
             <a:r>
-              <a:rPr kumimoji="1" lang="ja-JP" altLang="en-US" smtClean="0"/>
+              <a:rPr kumimoji="1" lang="ja-JP" altLang="en-US"/>
               <a:t>第 </a:t>
             </a:r>
             <a:r>
-              <a:rPr kumimoji="1" lang="en-US" altLang="ja-JP" smtClean="0"/>
+              <a:rPr kumimoji="1" lang="en-US" altLang="ja-JP"/>
               <a:t>4 </a:t>
             </a:r>
             <a:r>
-              <a:rPr kumimoji="1" lang="ja-JP" altLang="en-US" smtClean="0"/>
+              <a:rPr kumimoji="1" lang="ja-JP" altLang="en-US"/>
               <a:t>レベル</a:t>
             </a:r>
           </a:p>
           <a:p>
             <a:pPr lvl="4"/>
             <a:r>
-              <a:rPr kumimoji="1" lang="ja-JP" altLang="en-US" smtClean="0"/>
+              <a:rPr kumimoji="1" lang="ja-JP" altLang="en-US"/>
               <a:t>第 </a:t>
             </a:r>
             <a:r>
-              <a:rPr kumimoji="1" lang="en-US" altLang="ja-JP" smtClean="0"/>
+              <a:rPr kumimoji="1" lang="en-US" altLang="ja-JP"/>
               <a:t>5 </a:t>
             </a:r>
             <a:r>
-              <a:rPr kumimoji="1" lang="ja-JP" altLang="en-US" smtClean="0"/>
+              <a:rPr kumimoji="1" lang="ja-JP" altLang="en-US"/>
               <a:t>レベル</a:t>
             </a:r>
-            <a:endParaRPr kumimoji="1" lang="ja-JP" altLang="en-US"/>
           </a:p>
         </p:txBody>
       </p:sp>
@@ -2326,7 +2313,7 @@
           <a:p>
             <a:pPr lvl="0"/>
             <a:r>
-              <a:rPr kumimoji="1" lang="ja-JP" altLang="en-US" smtClean="0"/>
+              <a:rPr kumimoji="1" lang="ja-JP" altLang="en-US"/>
               <a:t>マスター テキストの書式設定</a:t>
             </a:r>
           </a:p>
@@ -2349,7 +2336,7 @@
           <a:p>
             <a:fld id="{B8DAB099-5D2C-433C-B6DE-CAADC0029E46}" type="datetimeFigureOut">
               <a:rPr kumimoji="1" lang="ja-JP" altLang="en-US" smtClean="0"/>
-              <a:t>2025/6/2</a:t>
+              <a:t>2026/3/5</a:t>
             </a:fld>
             <a:endParaRPr kumimoji="1" lang="ja-JP" altLang="en-US"/>
           </a:p>
@@ -2452,10 +2439,9 @@
           </a:lstStyle>
           <a:p>
             <a:r>
-              <a:rPr kumimoji="1" lang="ja-JP" altLang="en-US" smtClean="0"/>
+              <a:rPr kumimoji="1" lang="ja-JP" altLang="en-US"/>
               <a:t>マスター タイトルの書式設定</a:t>
             </a:r>
-            <a:endParaRPr kumimoji="1" lang="ja-JP" altLang="en-US"/>
           </a:p>
         </p:txBody>
       </p:sp>
@@ -2579,7 +2565,7 @@
           <a:p>
             <a:pPr lvl="0"/>
             <a:r>
-              <a:rPr kumimoji="1" lang="ja-JP" altLang="en-US" smtClean="0"/>
+              <a:rPr kumimoji="1" lang="ja-JP" altLang="en-US"/>
               <a:t>マスター テキストの書式設定</a:t>
             </a:r>
           </a:p>
@@ -2602,7 +2588,7 @@
           <a:p>
             <a:fld id="{B8DAB099-5D2C-433C-B6DE-CAADC0029E46}" type="datetimeFigureOut">
               <a:rPr kumimoji="1" lang="ja-JP" altLang="en-US" smtClean="0"/>
-              <a:t>2025/6/2</a:t>
+              <a:t>2026/3/5</a:t>
             </a:fld>
             <a:endParaRPr kumimoji="1" lang="ja-JP" altLang="en-US"/>
           </a:p>
@@ -2711,10 +2697,9 @@
           <a:lstStyle/>
           <a:p>
             <a:r>
-              <a:rPr kumimoji="1" lang="ja-JP" altLang="en-US" smtClean="0"/>
+              <a:rPr kumimoji="1" lang="ja-JP" altLang="en-US"/>
               <a:t>マスター タイトルの書式設定</a:t>
             </a:r>
-            <a:endParaRPr kumimoji="1" lang="ja-JP" altLang="en-US"/>
           </a:p>
         </p:txBody>
       </p:sp>
@@ -2745,70 +2730,69 @@
           <a:p>
             <a:pPr lvl="0"/>
             <a:r>
-              <a:rPr kumimoji="1" lang="ja-JP" altLang="en-US" smtClean="0"/>
+              <a:rPr kumimoji="1" lang="ja-JP" altLang="en-US"/>
               <a:t>マスター テキストの書式設定</a:t>
             </a:r>
           </a:p>
           <a:p>
             <a:pPr lvl="1"/>
             <a:r>
-              <a:rPr kumimoji="1" lang="ja-JP" altLang="en-US" smtClean="0"/>
+              <a:rPr kumimoji="1" lang="ja-JP" altLang="en-US"/>
               <a:t>第 </a:t>
             </a:r>
             <a:r>
-              <a:rPr kumimoji="1" lang="en-US" altLang="ja-JP" smtClean="0"/>
+              <a:rPr kumimoji="1" lang="en-US" altLang="ja-JP"/>
               <a:t>2 </a:t>
             </a:r>
             <a:r>
-              <a:rPr kumimoji="1" lang="ja-JP" altLang="en-US" smtClean="0"/>
+              <a:rPr kumimoji="1" lang="ja-JP" altLang="en-US"/>
               <a:t>レベル</a:t>
             </a:r>
           </a:p>
           <a:p>
             <a:pPr lvl="2"/>
             <a:r>
-              <a:rPr kumimoji="1" lang="ja-JP" altLang="en-US" smtClean="0"/>
+              <a:rPr kumimoji="1" lang="ja-JP" altLang="en-US"/>
               <a:t>第 </a:t>
             </a:r>
             <a:r>
-              <a:rPr kumimoji="1" lang="en-US" altLang="ja-JP" smtClean="0"/>
+              <a:rPr kumimoji="1" lang="en-US" altLang="ja-JP"/>
               <a:t>3 </a:t>
             </a:r>
             <a:r>
-              <a:rPr kumimoji="1" lang="ja-JP" altLang="en-US" smtClean="0"/>
+              <a:rPr kumimoji="1" lang="ja-JP" altLang="en-US"/>
               <a:t>レベル</a:t>
             </a:r>
           </a:p>
           <a:p>
             <a:pPr lvl="3"/>
             <a:r>
-              <a:rPr kumimoji="1" lang="ja-JP" altLang="en-US" smtClean="0"/>
+              <a:rPr kumimoji="1" lang="ja-JP" altLang="en-US"/>
               <a:t>第 </a:t>
             </a:r>
             <a:r>
-              <a:rPr kumimoji="1" lang="en-US" altLang="ja-JP" smtClean="0"/>
+              <a:rPr kumimoji="1" lang="en-US" altLang="ja-JP"/>
               <a:t>4 </a:t>
             </a:r>
             <a:r>
-              <a:rPr kumimoji="1" lang="ja-JP" altLang="en-US" smtClean="0"/>
+              <a:rPr kumimoji="1" lang="ja-JP" altLang="en-US"/>
               <a:t>レベル</a:t>
             </a:r>
           </a:p>
           <a:p>
             <a:pPr lvl="4"/>
             <a:r>
-              <a:rPr kumimoji="1" lang="ja-JP" altLang="en-US" smtClean="0"/>
+              <a:rPr kumimoji="1" lang="ja-JP" altLang="en-US"/>
               <a:t>第 </a:t>
             </a:r>
             <a:r>
-              <a:rPr kumimoji="1" lang="en-US" altLang="ja-JP" smtClean="0"/>
+              <a:rPr kumimoji="1" lang="en-US" altLang="ja-JP"/>
               <a:t>5 </a:t>
             </a:r>
             <a:r>
-              <a:rPr kumimoji="1" lang="ja-JP" altLang="en-US" smtClean="0"/>
+              <a:rPr kumimoji="1" lang="ja-JP" altLang="en-US"/>
               <a:t>レベル</a:t>
             </a:r>
-            <a:endParaRPr kumimoji="1" lang="ja-JP" altLang="en-US"/>
           </a:p>
         </p:txBody>
       </p:sp>
@@ -2847,7 +2831,7 @@
           <a:p>
             <a:fld id="{B8DAB099-5D2C-433C-B6DE-CAADC0029E46}" type="datetimeFigureOut">
               <a:rPr kumimoji="1" lang="ja-JP" altLang="en-US" smtClean="0"/>
-              <a:t>2025/6/2</a:t>
+              <a:t>2026/3/5</a:t>
             </a:fld>
             <a:endParaRPr kumimoji="1" lang="ja-JP" altLang="en-US"/>
           </a:p>
@@ -3260,8 +3244,8 @@
         </p:nvSpPr>
         <p:spPr>
           <a:xfrm>
-            <a:off x="-222056" y="353546"/>
-            <a:ext cx="6026066" cy="2800767"/>
+            <a:off x="-970256" y="353546"/>
+            <a:ext cx="6589438" cy="2800767"/>
           </a:xfrm>
           <a:prstGeom prst="rect">
             <a:avLst/>
@@ -3284,61 +3268,6 @@
           <a:lstStyle/>
           <a:p>
             <a:pPr algn="ctr"/>
-            <a:r>
-              <a:rPr lang="en-US" altLang="ja-JP" sz="8800" b="1" i="1" dirty="0" smtClean="0">
-                <a:ln w="0"/>
-                <a:solidFill>
-                  <a:srgbClr val="D000D0"/>
-                </a:solidFill>
-                <a:effectLst>
-                  <a:glow rad="127000">
-                    <a:schemeClr val="accent1">
-                      <a:satMod val="175000"/>
-                      <a:alpha val="25000"/>
-                    </a:schemeClr>
-                  </a:glow>
-                  <a:outerShdw blurRad="25400" sx="103000" sy="103000" algn="ctr" rotWithShape="0">
-                    <a:prstClr val="black">
-                      <a:alpha val="40000"/>
-                    </a:prstClr>
-                  </a:outerShdw>
-                  <a:reflection blurRad="63500" stA="50000" endPos="40000" dir="5400000" sy="-90000" algn="bl" rotWithShape="0"/>
-                </a:effectLst>
-                <a:latin typeface="Cambria" panose="02040503050406030204" pitchFamily="18" charset="0"/>
-                <a:ea typeface="Cambria" panose="02040503050406030204" pitchFamily="18" charset="0"/>
-                <a:cs typeface="Arial" panose="020B0604020202020204" pitchFamily="34" charset="0"/>
-              </a:rPr>
-              <a:t>Defend</a:t>
-            </a:r>
-          </a:p>
-          <a:p>
-            <a:pPr algn="ctr"/>
-            <a:r>
-              <a:rPr lang="en-US" altLang="ja-JP" sz="8800" b="1" i="1" dirty="0" smtClean="0">
-                <a:ln w="0"/>
-                <a:solidFill>
-                  <a:srgbClr val="D000D0"/>
-                </a:solidFill>
-                <a:effectLst>
-                  <a:glow rad="127000">
-                    <a:schemeClr val="accent1">
-                      <a:satMod val="175000"/>
-                      <a:alpha val="25000"/>
-                    </a:schemeClr>
-                  </a:glow>
-                  <a:outerShdw blurRad="25400" sx="103000" sy="103000" algn="ctr" rotWithShape="0">
-                    <a:prstClr val="black">
-                      <a:alpha val="40000"/>
-                    </a:prstClr>
-                  </a:outerShdw>
-                  <a:reflection blurRad="63500" stA="50000" endPos="40000" dir="5400000" sy="-90000" algn="bl" rotWithShape="0"/>
-                </a:effectLst>
-                <a:latin typeface="Cambria" panose="02040503050406030204" pitchFamily="18" charset="0"/>
-                <a:ea typeface="Cambria" panose="02040503050406030204" pitchFamily="18" charset="0"/>
-                <a:cs typeface="Arial" panose="020B0604020202020204" pitchFamily="34" charset="0"/>
-              </a:rPr>
-              <a:t>the </a:t>
-            </a:r>
             <a:r>
               <a:rPr lang="en-US" altLang="ja-JP" sz="8800" b="1" i="1" dirty="0">
                 <a:ln w="0"/>
@@ -3363,7 +3292,7 @@
                 <a:ea typeface="Cambria" panose="02040503050406030204" pitchFamily="18" charset="0"/>
                 <a:cs typeface="Arial" panose="020B0604020202020204" pitchFamily="34" charset="0"/>
               </a:rPr>
-              <a:t>castle</a:t>
+              <a:t>Catastrophe War</a:t>
             </a:r>
             <a:endParaRPr kumimoji="1" lang="ja-JP" altLang="en-US" sz="8800" b="1" i="1" dirty="0">
               <a:ln w="0"/>
@@ -3398,8 +3327,8 @@
         </p:nvSpPr>
         <p:spPr>
           <a:xfrm>
-            <a:off x="123526" y="3738543"/>
-            <a:ext cx="6026066" cy="2800767"/>
+            <a:off x="-624674" y="3738543"/>
+            <a:ext cx="6589438" cy="2800767"/>
           </a:xfrm>
           <a:prstGeom prst="rect">
             <a:avLst/>
@@ -3422,67 +3351,6 @@
           <a:lstStyle/>
           <a:p>
             <a:pPr algn="ctr"/>
-            <a:r>
-              <a:rPr lang="en-US" altLang="ja-JP" sz="8800" b="1" i="1" dirty="0" smtClean="0">
-                <a:ln w="0"/>
-                <a:solidFill>
-                  <a:schemeClr val="accent4">
-                    <a:lumMod val="60000"/>
-                    <a:lumOff val="40000"/>
-                  </a:schemeClr>
-                </a:solidFill>
-                <a:effectLst>
-                  <a:glow rad="127000">
-                    <a:schemeClr val="accent1">
-                      <a:satMod val="175000"/>
-                      <a:alpha val="25000"/>
-                    </a:schemeClr>
-                  </a:glow>
-                  <a:outerShdw blurRad="25400" sx="103000" sy="103000" algn="ctr" rotWithShape="0">
-                    <a:prstClr val="black">
-                      <a:alpha val="40000"/>
-                    </a:prstClr>
-                  </a:outerShdw>
-                  <a:reflection blurRad="63500" stA="50000" endPos="40000" dir="5400000" sy="-90000" algn="bl" rotWithShape="0"/>
-                </a:effectLst>
-                <a:latin typeface="Cambria" panose="02040503050406030204" pitchFamily="18" charset="0"/>
-                <a:ea typeface="Cambria" panose="02040503050406030204" pitchFamily="18" charset="0"/>
-                <a:cs typeface="Arial" panose="020B0604020202020204" pitchFamily="34" charset="0"/>
-              </a:rPr>
-              <a:t>Defend</a:t>
-            </a:r>
-          </a:p>
-          <a:p>
-            <a:pPr algn="ctr"/>
-            <a:r>
-              <a:rPr lang="en-US" altLang="ja-JP" sz="8800" b="1" i="1" dirty="0" smtClean="0">
-                <a:ln w="0"/>
-                <a:solidFill>
-                  <a:schemeClr val="accent4">
-                    <a:lumMod val="60000"/>
-                    <a:lumOff val="40000"/>
-                  </a:schemeClr>
-                </a:solidFill>
-                <a:effectLst>
-                  <a:glow rad="127000">
-                    <a:schemeClr val="accent1">
-                      <a:satMod val="175000"/>
-                      <a:alpha val="25000"/>
-                    </a:schemeClr>
-                  </a:glow>
-                  <a:outerShdw blurRad="25400" sx="103000" sy="103000" algn="ctr" rotWithShape="0">
-                    <a:prstClr val="black">
-                      <a:alpha val="40000"/>
-                    </a:prstClr>
-                  </a:outerShdw>
-                  <a:reflection blurRad="63500" stA="50000" endPos="40000" dir="5400000" sy="-90000" algn="bl" rotWithShape="0"/>
-                </a:effectLst>
-                <a:latin typeface="Cambria" panose="02040503050406030204" pitchFamily="18" charset="0"/>
-                <a:ea typeface="Cambria" panose="02040503050406030204" pitchFamily="18" charset="0"/>
-                <a:cs typeface="Arial" panose="020B0604020202020204" pitchFamily="34" charset="0"/>
-              </a:rPr>
-              <a:t>the </a:t>
-            </a:r>
             <a:r>
               <a:rPr lang="en-US" altLang="ja-JP" sz="8800" b="1" i="1" dirty="0">
                 <a:ln w="0"/>
@@ -3510,33 +3378,8 @@
                 <a:ea typeface="Cambria" panose="02040503050406030204" pitchFamily="18" charset="0"/>
                 <a:cs typeface="Arial" panose="020B0604020202020204" pitchFamily="34" charset="0"/>
               </a:rPr>
-              <a:t>castle</a:t>
-            </a:r>
-            <a:endParaRPr kumimoji="1" lang="ja-JP" altLang="en-US" sz="8800" b="1" i="1" dirty="0">
-              <a:ln w="0"/>
-              <a:solidFill>
-                <a:schemeClr val="accent4">
-                  <a:lumMod val="60000"/>
-                  <a:lumOff val="40000"/>
-                </a:schemeClr>
-              </a:solidFill>
-              <a:effectLst>
-                <a:glow rad="127000">
-                  <a:schemeClr val="accent1">
-                    <a:satMod val="175000"/>
-                    <a:alpha val="25000"/>
-                  </a:schemeClr>
-                </a:glow>
-                <a:outerShdw blurRad="25400" sx="103000" sy="103000" algn="ctr" rotWithShape="0">
-                  <a:prstClr val="black">
-                    <a:alpha val="40000"/>
-                  </a:prstClr>
-                </a:outerShdw>
-                <a:reflection blurRad="63500" stA="50000" endPos="40000" dir="5400000" sy="-90000" algn="bl" rotWithShape="0"/>
-              </a:effectLst>
-              <a:latin typeface="Cambria" panose="02040503050406030204" pitchFamily="18" charset="0"/>
-              <a:cs typeface="Arial" panose="020B0604020202020204" pitchFamily="34" charset="0"/>
-            </a:endParaRPr>
+              <a:t>Catastrophe War</a:t>
+            </a:r>
           </a:p>
         </p:txBody>
       </p:sp>
@@ -3548,8 +3391,8 @@
         </p:nvSpPr>
         <p:spPr>
           <a:xfrm>
-            <a:off x="5710811" y="3738543"/>
-            <a:ext cx="6026066" cy="2800767"/>
+            <a:off x="6207753" y="3738543"/>
+            <a:ext cx="6589438" cy="2800767"/>
           </a:xfrm>
           <a:prstGeom prst="rect">
             <a:avLst/>
@@ -3572,65 +3415,6 @@
           <a:lstStyle/>
           <a:p>
             <a:pPr algn="ctr"/>
-            <a:r>
-              <a:rPr lang="en-US" altLang="ja-JP" sz="8800" b="1" i="1" dirty="0" smtClean="0">
-                <a:ln w="0"/>
-                <a:solidFill>
-                  <a:schemeClr val="accent1">
-                    <a:lumMod val="75000"/>
-                  </a:schemeClr>
-                </a:solidFill>
-                <a:effectLst>
-                  <a:glow rad="127000">
-                    <a:schemeClr val="accent1">
-                      <a:satMod val="175000"/>
-                      <a:alpha val="25000"/>
-                    </a:schemeClr>
-                  </a:glow>
-                  <a:outerShdw blurRad="25400" sx="103000" sy="103000" algn="ctr" rotWithShape="0">
-                    <a:prstClr val="black">
-                      <a:alpha val="40000"/>
-                    </a:prstClr>
-                  </a:outerShdw>
-                  <a:reflection blurRad="63500" stA="50000" endPos="40000" dir="5400000" sy="-90000" algn="bl" rotWithShape="0"/>
-                </a:effectLst>
-                <a:latin typeface="Cambria" panose="02040503050406030204" pitchFamily="18" charset="0"/>
-                <a:ea typeface="Cambria" panose="02040503050406030204" pitchFamily="18" charset="0"/>
-                <a:cs typeface="Arial" panose="020B0604020202020204" pitchFamily="34" charset="0"/>
-              </a:rPr>
-              <a:t>Defend</a:t>
-            </a:r>
-          </a:p>
-          <a:p>
-            <a:pPr algn="ctr"/>
-            <a:r>
-              <a:rPr lang="en-US" altLang="ja-JP" sz="8800" b="1" i="1" dirty="0" smtClean="0">
-                <a:ln w="0"/>
-                <a:solidFill>
-                  <a:schemeClr val="accent1">
-                    <a:lumMod val="75000"/>
-                  </a:schemeClr>
-                </a:solidFill>
-                <a:effectLst>
-                  <a:glow rad="127000">
-                    <a:schemeClr val="accent1">
-                      <a:satMod val="175000"/>
-                      <a:alpha val="25000"/>
-                    </a:schemeClr>
-                  </a:glow>
-                  <a:outerShdw blurRad="25400" sx="103000" sy="103000" algn="ctr" rotWithShape="0">
-                    <a:prstClr val="black">
-                      <a:alpha val="40000"/>
-                    </a:prstClr>
-                  </a:outerShdw>
-                  <a:reflection blurRad="63500" stA="50000" endPos="40000" dir="5400000" sy="-90000" algn="bl" rotWithShape="0"/>
-                </a:effectLst>
-                <a:latin typeface="Cambria" panose="02040503050406030204" pitchFamily="18" charset="0"/>
-                <a:ea typeface="Cambria" panose="02040503050406030204" pitchFamily="18" charset="0"/>
-                <a:cs typeface="Arial" panose="020B0604020202020204" pitchFamily="34" charset="0"/>
-              </a:rPr>
-              <a:t>the </a:t>
-            </a:r>
             <a:r>
               <a:rPr lang="en-US" altLang="ja-JP" sz="8800" b="1" i="1" dirty="0">
                 <a:ln w="0"/>
@@ -3657,32 +3441,8 @@
                 <a:ea typeface="Cambria" panose="02040503050406030204" pitchFamily="18" charset="0"/>
                 <a:cs typeface="Arial" panose="020B0604020202020204" pitchFamily="34" charset="0"/>
               </a:rPr>
-              <a:t>castle</a:t>
-            </a:r>
-            <a:endParaRPr kumimoji="1" lang="ja-JP" altLang="en-US" sz="8800" b="1" i="1" dirty="0">
-              <a:ln w="0"/>
-              <a:solidFill>
-                <a:schemeClr val="accent1">
-                  <a:lumMod val="75000"/>
-                </a:schemeClr>
-              </a:solidFill>
-              <a:effectLst>
-                <a:glow rad="127000">
-                  <a:schemeClr val="accent1">
-                    <a:satMod val="175000"/>
-                    <a:alpha val="25000"/>
-                  </a:schemeClr>
-                </a:glow>
-                <a:outerShdw blurRad="25400" sx="103000" sy="103000" algn="ctr" rotWithShape="0">
-                  <a:prstClr val="black">
-                    <a:alpha val="40000"/>
-                  </a:prstClr>
-                </a:outerShdw>
-                <a:reflection blurRad="63500" stA="50000" endPos="40000" dir="5400000" sy="-90000" algn="bl" rotWithShape="0"/>
-              </a:effectLst>
-              <a:latin typeface="Cambria" panose="02040503050406030204" pitchFamily="18" charset="0"/>
-              <a:cs typeface="Arial" panose="020B0604020202020204" pitchFamily="34" charset="0"/>
-            </a:endParaRPr>
+              <a:t>Catastrophe War</a:t>
+            </a:r>
           </a:p>
         </p:txBody>
       </p:sp>
@@ -3694,8 +3454,8 @@
         </p:nvSpPr>
         <p:spPr>
           <a:xfrm>
-            <a:off x="5466112" y="353545"/>
-            <a:ext cx="6026066" cy="2800767"/>
+            <a:off x="5963054" y="353545"/>
+            <a:ext cx="6589438" cy="2800767"/>
           </a:xfrm>
           <a:prstGeom prst="rect">
             <a:avLst/>
@@ -3718,67 +3478,6 @@
           <a:lstStyle/>
           <a:p>
             <a:pPr algn="ctr"/>
-            <a:r>
-              <a:rPr lang="en-US" altLang="ja-JP" sz="8800" b="1" i="1" dirty="0" smtClean="0">
-                <a:ln w="0"/>
-                <a:solidFill>
-                  <a:schemeClr val="accent2">
-                    <a:lumMod val="60000"/>
-                    <a:lumOff val="40000"/>
-                  </a:schemeClr>
-                </a:solidFill>
-                <a:effectLst>
-                  <a:glow rad="127000">
-                    <a:schemeClr val="accent1">
-                      <a:satMod val="175000"/>
-                      <a:alpha val="25000"/>
-                    </a:schemeClr>
-                  </a:glow>
-                  <a:outerShdw blurRad="25400" sx="103000" sy="103000" algn="ctr" rotWithShape="0">
-                    <a:prstClr val="black">
-                      <a:alpha val="40000"/>
-                    </a:prstClr>
-                  </a:outerShdw>
-                  <a:reflection blurRad="63500" stA="50000" endPos="40000" dir="5400000" sy="-90000" algn="bl" rotWithShape="0"/>
-                </a:effectLst>
-                <a:latin typeface="Cambria" panose="02040503050406030204" pitchFamily="18" charset="0"/>
-                <a:ea typeface="Cambria" panose="02040503050406030204" pitchFamily="18" charset="0"/>
-                <a:cs typeface="Arial" panose="020B0604020202020204" pitchFamily="34" charset="0"/>
-              </a:rPr>
-              <a:t>Defend</a:t>
-            </a:r>
-          </a:p>
-          <a:p>
-            <a:pPr algn="ctr"/>
-            <a:r>
-              <a:rPr lang="en-US" altLang="ja-JP" sz="8800" b="1" i="1" dirty="0" smtClean="0">
-                <a:ln w="0"/>
-                <a:solidFill>
-                  <a:schemeClr val="accent2">
-                    <a:lumMod val="60000"/>
-                    <a:lumOff val="40000"/>
-                  </a:schemeClr>
-                </a:solidFill>
-                <a:effectLst>
-                  <a:glow rad="127000">
-                    <a:schemeClr val="accent1">
-                      <a:satMod val="175000"/>
-                      <a:alpha val="25000"/>
-                    </a:schemeClr>
-                  </a:glow>
-                  <a:outerShdw blurRad="25400" sx="103000" sy="103000" algn="ctr" rotWithShape="0">
-                    <a:prstClr val="black">
-                      <a:alpha val="40000"/>
-                    </a:prstClr>
-                  </a:outerShdw>
-                  <a:reflection blurRad="63500" stA="50000" endPos="40000" dir="5400000" sy="-90000" algn="bl" rotWithShape="0"/>
-                </a:effectLst>
-                <a:latin typeface="Cambria" panose="02040503050406030204" pitchFamily="18" charset="0"/>
-                <a:ea typeface="Cambria" panose="02040503050406030204" pitchFamily="18" charset="0"/>
-                <a:cs typeface="Arial" panose="020B0604020202020204" pitchFamily="34" charset="0"/>
-              </a:rPr>
-              <a:t>the </a:t>
-            </a:r>
             <a:r>
               <a:rPr lang="en-US" altLang="ja-JP" sz="8800" b="1" i="1" dirty="0">
                 <a:ln w="0"/>
@@ -3806,7 +3505,7 @@
                 <a:ea typeface="Cambria" panose="02040503050406030204" pitchFamily="18" charset="0"/>
                 <a:cs typeface="Arial" panose="020B0604020202020204" pitchFamily="34" charset="0"/>
               </a:rPr>
-              <a:t>castle</a:t>
+              <a:t>Catastrophe War</a:t>
             </a:r>
             <a:endParaRPr kumimoji="1" lang="ja-JP" altLang="en-US" sz="8800" b="1" i="1" dirty="0">
               <a:ln w="0"/>
@@ -3846,13 +3545,6 @@
   <p:clrMapOvr>
     <a:masterClrMapping/>
   </p:clrMapOvr>
-  <p:timing>
-    <p:tnLst>
-      <p:par>
-        <p:cTn id="1" dur="indefinite" restart="never" nodeType="tmRoot"/>
-      </p:par>
-    </p:tnLst>
-  </p:timing>
 </p:sld>
 </file>
 
